--- a/dist/초2/수학/도형과측정/초2_수학_도형과측정_01_여러가지도형_학생용.pptx
+++ b/dist/초2/수학/도형과측정/초2_수학_도형과측정_01_여러가지도형_학생용.pptx
@@ -119,13 +119,13 @@
   <p:extLst>
     <p:ext uri="{521415D9-36F7-43E2-AB2F-B90AF26B5E84}">
       <p14:sectionLst xmlns:p14="http://schemas.microsoft.com/office/powerpoint/2010/main">
-        <p14:section name="도입" id="{3cdf9d4b-7148-78e1-6e41-30692ee954a6}">
+        <p14:section name="도입" id="{1a52b8d9-4ea4-7347-2fa9-69ff168500bf}">
           <p14:sldIdLst>
             <p14:sldId id="256"/>
             <p14:sldId id="257"/>
           </p14:sldIdLst>
         </p14:section>
-        <p14:section name="개념" id="{a044afae-3fc5-00bd-cbb3-23674024478d}">
+        <p14:section name="개념" id="{c27e9dc2-d4e0-e11f-e6e3-3051eb9622cd}">
           <p14:sldIdLst>
             <p14:sldId id="258"/>
             <p14:sldId id="259"/>
@@ -135,23 +135,23 @@
             <p14:sldId id="263"/>
           </p14:sldIdLst>
         </p14:section>
-        <p14:section name="연습" id="{c2a22291-57b1-4ccb-6c5d-186eb2f04032}">
+        <p14:section name="연습" id="{8bc51958-709d-8b77-004b-41580bfdefe3}">
           <p14:sldIdLst>
             <p14:sldId id="264"/>
           </p14:sldIdLst>
         </p14:section>
-        <p14:section name="확인" id="{f467e59b-e255-0a29-6f9d-47f63c60297d}">
+        <p14:section name="확인" id="{ad4c3eaf-2c1d-7e8c-1dec-8881dac51a28}">
           <p14:sldIdLst>
             <p14:sldId id="265"/>
             <p14:sldId id="266"/>
           </p14:sldIdLst>
         </p14:section>
-        <p14:section name="정리" id="{e9091c1b-4a4b-21a5-1124-c38bf8506f8b}">
+        <p14:section name="정리" id="{ae201dcd-2d12-911a-e5a5-3a6a0889800c}">
           <p14:sldIdLst>
             <p14:sldId id="267"/>
           </p14:sldIdLst>
         </p14:section>
-        <p14:section name="보충" id="{d62a2725-6e73-778a-cbec-ad88d758717f}">
+        <p14:section name="보충" id="{59e77630-3521-d389-9c05-fc5b0105dee3}">
           <p14:sldIdLst>
             <p14:sldId id="268"/>
           </p14:sldIdLst>

--- a/dist/초2/수학/도형과측정/초2_수학_도형과측정_01_여러가지도형_학생용.pptx
+++ b/dist/초2/수학/도형과측정/초2_수학_도형과측정_01_여러가지도형_학생용.pptx
@@ -119,13 +119,13 @@
   <p:extLst>
     <p:ext uri="{521415D9-36F7-43E2-AB2F-B90AF26B5E84}">
       <p14:sectionLst xmlns:p14="http://schemas.microsoft.com/office/powerpoint/2010/main">
-        <p14:section name="도입" id="{1a52b8d9-4ea4-7347-2fa9-69ff168500bf}">
+        <p14:section name="도입" id="{b99b5ad1-3018-5c5d-1139-ca4c54601bb3}">
           <p14:sldIdLst>
             <p14:sldId id="256"/>
             <p14:sldId id="257"/>
           </p14:sldIdLst>
         </p14:section>
-        <p14:section name="개념" id="{c27e9dc2-d4e0-e11f-e6e3-3051eb9622cd}">
+        <p14:section name="개념" id="{488159c5-3a48-d506-a2ae-302e12836a65}">
           <p14:sldIdLst>
             <p14:sldId id="258"/>
             <p14:sldId id="259"/>
@@ -135,23 +135,23 @@
             <p14:sldId id="263"/>
           </p14:sldIdLst>
         </p14:section>
-        <p14:section name="연습" id="{8bc51958-709d-8b77-004b-41580bfdefe3}">
+        <p14:section name="연습" id="{39c63513-bc15-58c7-e9e9-ea08ed96c444}">
           <p14:sldIdLst>
             <p14:sldId id="264"/>
           </p14:sldIdLst>
         </p14:section>
-        <p14:section name="확인" id="{ad4c3eaf-2c1d-7e8c-1dec-8881dac51a28}">
+        <p14:section name="확인" id="{3eaabde5-0d83-d896-0e19-a6e1dd908f8b}">
           <p14:sldIdLst>
             <p14:sldId id="265"/>
             <p14:sldId id="266"/>
           </p14:sldIdLst>
         </p14:section>
-        <p14:section name="정리" id="{ae201dcd-2d12-911a-e5a5-3a6a0889800c}">
+        <p14:section name="정리" id="{89372a9b-7282-cc48-0f35-1b5beaa14c8d}">
           <p14:sldIdLst>
             <p14:sldId id="267"/>
           </p14:sldIdLst>
         </p14:section>
-        <p14:section name="보충" id="{59e77630-3521-d389-9c05-fc5b0105dee3}">
+        <p14:section name="보충" id="{22f22ee0-a639-cd2a-156a-8f766ae62103}">
           <p14:sldIdLst>
             <p14:sldId id="268"/>
           </p14:sldIdLst>
@@ -3051,7 +3051,7 @@
         </p:nvSpPr>
         <p:spPr>
           <a:xfrm>
-            <a:off x="548640" y="2459736"/>
+            <a:off x="548640" y="2734056"/>
             <a:ext cx="566928" cy="566928"/>
           </a:xfrm>
           <a:prstGeom prst="roundRect">
@@ -3098,8 +3098,8 @@
         </p:nvSpPr>
         <p:spPr>
           <a:xfrm>
-            <a:off x="2916936" y="2011680"/>
-            <a:ext cx="1060704" cy="1325880"/>
+            <a:off x="2878074" y="2011680"/>
+            <a:ext cx="1499616" cy="1874520"/>
           </a:xfrm>
           <a:prstGeom prst="diamond">
             <a:avLst/>
@@ -3123,7 +3123,7 @@
         </p:nvSpPr>
         <p:spPr>
           <a:xfrm>
-            <a:off x="6277356" y="2459736"/>
+            <a:off x="6277356" y="2734056"/>
             <a:ext cx="566928" cy="566928"/>
           </a:xfrm>
           <a:prstGeom prst="roundRect">
@@ -3170,8 +3170,8 @@
         </p:nvSpPr>
         <p:spPr>
           <a:xfrm>
-            <a:off x="8513064" y="2098150"/>
-            <a:ext cx="1325880" cy="1152939"/>
+            <a:off x="8419338" y="2133931"/>
+            <a:ext cx="1874520" cy="1630017"/>
           </a:xfrm>
           <a:prstGeom prst="hexagon">
             <a:avLst/>
@@ -4889,7 +4889,7 @@
         </p:nvSpPr>
         <p:spPr>
           <a:xfrm>
-            <a:off x="2875788" y="2063635"/>
+            <a:off x="3515868" y="2063635"/>
             <a:ext cx="1143000" cy="1039091"/>
           </a:xfrm>
           <a:prstGeom prst="triangle">
@@ -4961,7 +4961,7 @@
         </p:nvSpPr>
         <p:spPr>
           <a:xfrm>
-            <a:off x="2875788" y="3689033"/>
+            <a:off x="3515868" y="3689033"/>
             <a:ext cx="1143000" cy="714375"/>
           </a:xfrm>
           <a:prstGeom prst="rect">
@@ -5033,7 +5033,7 @@
         </p:nvSpPr>
         <p:spPr>
           <a:xfrm>
-            <a:off x="2875788" y="4937760"/>
+            <a:off x="3515868" y="4937760"/>
             <a:ext cx="1143000" cy="1143000"/>
           </a:xfrm>
           <a:prstGeom prst="ellipse">
@@ -6827,7 +6827,7 @@
         </p:nvSpPr>
         <p:spPr>
           <a:xfrm>
-            <a:off x="2784348" y="2098150"/>
+            <a:off x="2964942" y="2098150"/>
             <a:ext cx="1325880" cy="1152939"/>
           </a:xfrm>
           <a:prstGeom prst="hexagon">
@@ -6899,7 +6899,7 @@
         </p:nvSpPr>
         <p:spPr>
           <a:xfrm>
-            <a:off x="8513064" y="2071947"/>
+            <a:off x="8693658" y="2071947"/>
             <a:ext cx="1325880" cy="1205345"/>
           </a:xfrm>
           <a:prstGeom prst="rtTriangle">
@@ -6971,7 +6971,7 @@
         </p:nvSpPr>
         <p:spPr>
           <a:xfrm>
-            <a:off x="2784348" y="3878580"/>
+            <a:off x="2964942" y="3878580"/>
             <a:ext cx="1325880" cy="883920"/>
           </a:xfrm>
           <a:prstGeom prst="trapezoid">
@@ -7043,7 +7043,7 @@
         </p:nvSpPr>
         <p:spPr>
           <a:xfrm>
-            <a:off x="8513064" y="3689169"/>
+            <a:off x="8693658" y="3689169"/>
             <a:ext cx="1325880" cy="1262743"/>
           </a:xfrm>
           <a:prstGeom prst="pentagon">

--- a/dist/초2/수학/도형과측정/초2_수학_도형과측정_01_여러가지도형_학생용.pptx
+++ b/dist/초2/수학/도형과측정/초2_수학_도형과측정_01_여러가지도형_학생용.pptx
@@ -119,13 +119,13 @@
   <p:extLst>
     <p:ext uri="{521415D9-36F7-43E2-AB2F-B90AF26B5E84}">
       <p14:sectionLst xmlns:p14="http://schemas.microsoft.com/office/powerpoint/2010/main">
-        <p14:section name="도입" id="{b99b5ad1-3018-5c5d-1139-ca4c54601bb3}">
+        <p14:section name="도입" id="{cdb36b32-2cb4-9ed3-466c-e625c669ba52}">
           <p14:sldIdLst>
             <p14:sldId id="256"/>
             <p14:sldId id="257"/>
           </p14:sldIdLst>
         </p14:section>
-        <p14:section name="개념" id="{488159c5-3a48-d506-a2ae-302e12836a65}">
+        <p14:section name="개념" id="{2e583b5a-00a9-2839-9991-867f25a28d1d}">
           <p14:sldIdLst>
             <p14:sldId id="258"/>
             <p14:sldId id="259"/>
@@ -135,23 +135,23 @@
             <p14:sldId id="263"/>
           </p14:sldIdLst>
         </p14:section>
-        <p14:section name="연습" id="{39c63513-bc15-58c7-e9e9-ea08ed96c444}">
+        <p14:section name="연습" id="{a5055d56-1de3-d8dc-858b-8fafb8607992}">
           <p14:sldIdLst>
             <p14:sldId id="264"/>
           </p14:sldIdLst>
         </p14:section>
-        <p14:section name="확인" id="{3eaabde5-0d83-d896-0e19-a6e1dd908f8b}">
+        <p14:section name="확인" id="{72794706-4c21-bfc8-4ce3-2a93d342bbe2}">
           <p14:sldIdLst>
             <p14:sldId id="265"/>
             <p14:sldId id="266"/>
           </p14:sldIdLst>
         </p14:section>
-        <p14:section name="정리" id="{89372a9b-7282-cc48-0f35-1b5beaa14c8d}">
+        <p14:section name="정리" id="{ddbcc92e-abb7-75d0-8414-e59225882ceb}">
           <p14:sldIdLst>
             <p14:sldId id="267"/>
           </p14:sldIdLst>
         </p14:section>
-        <p14:section name="보충" id="{22f22ee0-a639-cd2a-156a-8f766ae62103}">
+        <p14:section name="보충" id="{4c1ebafd-ee97-6475-cf3d-bb7741d89b1a}">
           <p14:sldIdLst>
             <p14:sldId id="268"/>
           </p14:sldIdLst>
